--- a/dist/초5/국어/독서와추론/초5_국어_독서와추론_01_단서로추론하기.pptx
+++ b/dist/초5/국어/독서와추론/초5_국어_독서와추론_01_단서로추론하기.pptx
@@ -120,13 +120,13 @@
   <p:extLst>
     <p:ext uri="{521415D9-36F7-43E2-AB2F-B90AF26B5E84}">
       <p14:sectionLst xmlns:p14="http://schemas.microsoft.com/office/powerpoint/2010/main">
-        <p14:section name="도입" id="{81f1bce3-e9c8-fa57-b393-9a82ff3e3dbd}">
+        <p14:section name="도입" id="{2c4d439c-75fb-5f9c-b93d-bd0a68431944}">
           <p14:sldIdLst>
             <p14:sldId id="256"/>
             <p14:sldId id="257"/>
           </p14:sldIdLst>
         </p14:section>
-        <p14:section name="개념" id="{ea781edd-a4a4-9450-83c2-438fed408c3b}">
+        <p14:section name="개념" id="{0577204d-d231-c57f-3016-3ffab2b5f43e}">
           <p14:sldIdLst>
             <p14:sldId id="258"/>
             <p14:sldId id="259"/>
@@ -134,26 +134,26 @@
             <p14:sldId id="261"/>
           </p14:sldIdLst>
         </p14:section>
-        <p14:section name="연습" id="{1a96ae0f-c605-275b-8838-9493c19a9a2f}">
+        <p14:section name="연습" id="{fbb38154-637f-9952-a1a0-2a72a24f858c}">
           <p14:sldIdLst>
             <p14:sldId id="262"/>
             <p14:sldId id="263"/>
             <p14:sldId id="264"/>
           </p14:sldIdLst>
         </p14:section>
-        <p14:section name="확인" id="{7a9ced06-b525-12e7-2a65-3e9d6c0c26eb}">
+        <p14:section name="확인" id="{760c3fbd-c6bb-f84e-4e6c-6a4bfaa286a2}">
           <p14:sldIdLst>
             <p14:sldId id="265"/>
             <p14:sldId id="266"/>
             <p14:sldId id="267"/>
           </p14:sldIdLst>
         </p14:section>
-        <p14:section name="정리" id="{4c74569c-3036-a763-45c6-02b6a5935f63}">
+        <p14:section name="정리" id="{46419ae8-8f55-35f4-a881-fdad7ed0ce11}">
           <p14:sldIdLst>
             <p14:sldId id="268"/>
           </p14:sldIdLst>
         </p14:section>
-        <p14:section name="보충" id="{ed5661de-de61-086d-9ef6-9b89ffe19f2d}">
+        <p14:section name="보충" id="{5a78d87a-a6e4-ed01-34de-14e3412d34bb}">
           <p14:sldIdLst>
             <p14:sldId id="269"/>
           </p14:sldIdLst>
